--- a/level4/slides/Level4_Lesson5_Slides.pptx
+++ b/level4/slides/Level4_Lesson5_Slides.pptx
@@ -1196,7 +1196,7 @@
           </a:p>
           <a:p>
             <a:r>
-              <a:t>No speaker? Read the script with a volunteer at a natural, friendly speed, two times. Say gonna and wanna where the script has them.</a:t>
+              <a:t>No speaker? Read the script with a volunteer at a natural, friendly speed, two times. The script says going to and want to. People often say gonna and wanna; learners only need to recognize those words.</a:t>
             </a:r>
           </a:p>
           <a:p>
@@ -1236,7 +1236,7 @@
           </a:p>
           <a:p>
             <a:r>
-              <a:t>Patricia: I'm gonna be away next week. I'm visiting my sister. Would you mind getting my mail?</a:t>
+              <a:t>Patricia: I'm going to be away next week. I'm visiting my sister. Would you mind getting my mail?</a:t>
             </a:r>
           </a:p>
           <a:p>
@@ -1256,7 +1256,7 @@
           </a:p>
           <a:p>
             <a:r>
-              <a:t>Patricia: I'm gonna give you my spare key tonight. Oh, and would you mind feeding my cat, too?</a:t>
+              <a:t>Patricia: I'm going to give you my spare key tonight. Oh, and would you mind feeding my cat, too?</a:t>
             </a:r>
           </a:p>
           <a:p>
@@ -1286,7 +1286,7 @@
           </a:p>
           <a:p>
             <a:r>
-              <a:t>Patricia: Oh, I'm sorry, I can't. I'll be away on Saturday. I wanna help, but I can't.</a:t>
+              <a:t>Patricia: Oh, I'm sorry, I can't. I'll be away on Saturday. I want to help, but I can't.</a:t>
             </a:r>
           </a:p>
           <a:p>
@@ -1636,7 +1636,7 @@
           <a:lstStyle/>
           <a:p>
             <a:r>
-              <a:t>"Hear it, say it" (3 min). Point to the script lines. gonna = going to: "I'm gonna be away next week." wanna = want to: "I wanna help, but I can't." You can say going to and want to.</a:t>
+              <a:t>"Hear it, say it" (3 min). Point to the script lines. gonna = going to: "I'm going to be away next week." wanna = want to: "I want to help, but I can't." You can say going to and want to.</a:t>
             </a:r>
           </a:p>
           <a:p>
@@ -1646,7 +1646,7 @@
           </a:p>
           <a:p>
             <a:r>
-              <a:t>Reductions: learners need to understand gonna and wanna; they can always say going to and want to.</a:t>
+              <a:t>Reductions: the listening says going to and want to. People often say gonna and wanna. Learners only need to recognize the short forms.</a:t>
             </a:r>
           </a:p>
           <a:p>
@@ -16466,6 +16466,17 @@
               <a:buNone/>
             </a:pPr>
             <a:r>
+              <a:rPr lang="en-US" sz="2000" dirty="0" b="1">
+                <a:solidFill>
+                  <a:srgbClr val="5B3FC4"/>
+                </a:solidFill>
+                <a:latin typeface="Lexend Deca" pitchFamily="34" charset="0"/>
+                <a:ea typeface="Lexend Deca" pitchFamily="34" charset="-122"/>
+                <a:cs typeface="Lexend Deca" pitchFamily="34" charset="-120"/>
+              </a:rPr>
+              <a:t>gonna</a:t>
+            </a:r>
+            <a:r>
               <a:rPr lang="en-US" sz="2000" dirty="0">
                 <a:solidFill>
                   <a:srgbClr val="1B2236"/>
@@ -16474,7 +16485,7 @@
                 <a:ea typeface="Lexend Deca" pitchFamily="34" charset="-122"/>
                 <a:cs typeface="Lexend Deca" pitchFamily="34" charset="-120"/>
               </a:rPr>
-              <a:t>You will hear </a:t>
+              <a:t> and </a:t>
             </a:r>
             <a:r>
               <a:rPr lang="en-US" sz="2000" dirty="0" b="1">
@@ -16485,7 +16496,7 @@
                 <a:ea typeface="Lexend Deca" pitchFamily="34" charset="-122"/>
                 <a:cs typeface="Lexend Deca" pitchFamily="34" charset="-120"/>
               </a:rPr>
-              <a:t>gonna</a:t>
+              <a:t>wanna</a:t>
             </a:r>
             <a:r>
               <a:rPr lang="en-US" sz="2000" dirty="0">
@@ -16496,29 +16507,7 @@
                 <a:ea typeface="Lexend Deca" pitchFamily="34" charset="-122"/>
                 <a:cs typeface="Lexend Deca" pitchFamily="34" charset="-120"/>
               </a:rPr>
-              <a:t> and </a:t>
-            </a:r>
-            <a:r>
-              <a:rPr lang="en-US" sz="2000" dirty="0" b="1">
-                <a:solidFill>
-                  <a:srgbClr val="5B3FC4"/>
-                </a:solidFill>
-                <a:latin typeface="Lexend Deca" pitchFamily="34" charset="0"/>
-                <a:ea typeface="Lexend Deca" pitchFamily="34" charset="-122"/>
-                <a:cs typeface="Lexend Deca" pitchFamily="34" charset="-120"/>
-              </a:rPr>
-              <a:t>wanna</a:t>
-            </a:r>
-            <a:r>
-              <a:rPr lang="en-US" sz="2000" dirty="0">
-                <a:solidFill>
-                  <a:srgbClr val="1B2236"/>
-                </a:solidFill>
-                <a:latin typeface="Lexend Deca" pitchFamily="34" charset="0"/>
-                <a:ea typeface="Lexend Deca" pitchFamily="34" charset="-122"/>
-                <a:cs typeface="Lexend Deca" pitchFamily="34" charset="-120"/>
-              </a:rPr>
-              <a:t>.</a:t>
+              <a:t> are short forms. This listening uses the full forms.</a:t>
             </a:r>
             <a:endParaRPr lang="en-US" sz="2000" dirty="0"/>
           </a:p>
@@ -16673,7 +16662,7 @@
                 <a:ea typeface="Lexend Deca" pitchFamily="34" charset="-122"/>
                 <a:cs typeface="Lexend Deca" pitchFamily="34" charset="-120"/>
               </a:rPr>
-              <a:t>gonna</a:t>
+              <a:t>going to</a:t>
             </a:r>
             <a:r>
               <a:rPr lang="en-US" sz="1800" dirty="0" b="1">
@@ -16760,7 +16749,7 @@
                 <a:ea typeface="Lexend Deca" pitchFamily="34" charset="-122"/>
                 <a:cs typeface="Lexend Deca" pitchFamily="34" charset="-120"/>
               </a:rPr>
-              <a:t>wanna</a:t>
+              <a:t>want to</a:t>
             </a:r>
             <a:r>
               <a:rPr lang="en-US" sz="1800" dirty="0" b="1">

--- a/level4/slides/Level4_Lesson5_Slides.pptx
+++ b/level4/slides/Level4_Lesson5_Slides.pptx
@@ -716,7 +716,7 @@
           </a:p>
           <a:p>
             <a:r>
-              <a:t>Goal 1: Would you mind getting my mail? Goal 2: No, not at all. I'll do it. / Sorry, I can't. I'll be away. Why don't you ask Lina? Goal 3: Do you mind if I open the window?</a:t>
+              <a:t>Goal 1: Would you mind getting my mail? Goal 2: No, not at all. I'll do it. / Sorry, I can't. I'll be away. Why don't you ask Lena? Goal 3: Do you mind if I open the window?</a:t>
             </a:r>
           </a:p>
           <a:p>
@@ -1251,7 +1251,7 @@
           </a:p>
           <a:p>
             <a:r>
-              <a:t>Mr. Wilson: No problem. Where will the key be?</a:t>
+              <a:t>Mr. Wilson: That is no problem. Where are you going to leave the key?</a:t>
             </a:r>
           </a:p>
           <a:p>
@@ -1276,7 +1276,7 @@
           </a:p>
           <a:p>
             <a:r>
-              <a:t>Narrator: The next day, at work, Patricia talks to her coworker, Omar.</a:t>
+              <a:t>Narrator: The next day at work, Patricia talks with Omar.</a:t>
             </a:r>
           </a:p>
           <a:p>
@@ -1296,7 +1296,7 @@
           </a:p>
           <a:p>
             <a:r>
-              <a:t>Patricia: Why don't you ask Lina? She wants more hours this month.</a:t>
+              <a:t>Patricia: Why don't you ask Lena? She wants more hours this month.</a:t>
             </a:r>
           </a:p>
           <a:p>
@@ -1991,7 +1991,7 @@
           </a:p>
           <a:p>
             <a:r>
-              <a:t>Questions and answers (2 min): Q: Someone asks Would you mind helping me? I want to help. Do I say yes? A: No! Say No, not at all. Mind asks "Is it a problem?" No = no problem. • Q: Would you mind to get or Would you mind getting? A: After mind, use -ing: Would you mind getting my mail? • Q: How do I say no politely? A: Say sorry, give a reason, and offer an idea: Sorry, I can't. I'll be away. Why don't you ask Lina?</a:t>
+              <a:t>Questions and answers (2 min): Q: Someone asks Would you mind helping me? I want to help. Do I say yes? A: No! Say No, not at all. Mind asks "Is it a problem?" No = no problem. • Q: Would you mind to get or Would you mind getting? A: After mind, use -ing: Would you mind getting my mail? • Q: How do I say no politely? A: Say sorry, give a reason, and offer an idea: Sorry, I can't. I'll be away. Why don't you ask Lena?</a:t>
             </a:r>
           </a:p>
           <a:p>
@@ -19723,7 +19723,7 @@
                 <a:ea typeface="Lexend Deca" pitchFamily="34" charset="-122"/>
                 <a:cs typeface="Lexend Deca" pitchFamily="34" charset="-120"/>
               </a:rPr>
-              <a:t>Why don't you ask Lina?</a:t>
+              <a:t>Why don't you ask Lena?</a:t>
             </a:r>
             <a:endParaRPr lang="en-US" sz="1800" dirty="0" b="1"/>
           </a:p>
@@ -30701,7 +30701,7 @@
                 <a:ea typeface="Lexend Deca" pitchFamily="34" charset="-122"/>
                 <a:cs typeface="Lexend Deca" pitchFamily="34" charset="-120"/>
               </a:rPr>
-              <a:t>Patricia, Mr. Wilson, Omar, Lina, Ana, Ms. Diaz, Tomás, Ms. Lee, and Mr. Ruiz are invented names. The listening story is invented.</a:t>
+              <a:t>Patricia, Mr. Wilson, Omar, Lena, Ana, Ms. Diaz, Tomás, Ms. Lee, and Mr. Ruiz are invented names. The listening story is invented.</a:t>
             </a:r>
             <a:endParaRPr lang="en-US" sz="1600" dirty="0" b="0"/>
           </a:p>

--- a/level4/slides/Level4_Lesson5_Slides.pptx
+++ b/level4/slides/Level4_Lesson5_Slides.pptx
@@ -1191,7 +1191,7 @@
           </a:p>
           <a:p>
             <a:r>
-              <a:t>The audio (about 1:47) is coming soon. When it is ready, it plays the conversation once; press play again for play 2. Until then, read the listening script (at the end of these notes) with a volunteer.</a:t>
+              <a:t>The audio (L4_L5_listening.mp3, about 1:54) plays the conversation once. Press play again for play 2. A third play is fine if the class needs it.</a:t>
             </a:r>
           </a:p>
           <a:p>
@@ -1201,7 +1201,7 @@
           </a:p>
           <a:p>
             <a:r>
-              <a:t>Audio: the listening audio for this lesson (about 1:47) is coming soon. It will use computer-generated voices (Chatterbox TTS cloned from synthetic Kokoro-82M reference clips); no recordings of real people. Until it is ready, read the listening script (in the notes of the Before You Listen slide) with a volunteer. The names and the story are invented.</a:t>
+              <a:t>Audio: synthetic voices, computer-generated (Chatterbox TTS cloned from Kokoro-82M reference clips). No recordings of real people. The names and the story are invented.</a:t>
             </a:r>
           </a:p>
           <a:p>
@@ -1212,116 +1212,6 @@
           <a:p>
             <a:r>
               <a:t>Picture: Twemoji graphics by Twitter, Inc. and other contributors (https://github.com/jdecked/twemoji), CC BY 4.0 (https://creativecommons.org/licenses/by/4.0/); resized and combined, with signs and labels (images/CREDITS.md).</a:t>
-            </a:r>
-          </a:p>
-          <a:p>
-            <a:r>
-              <a:t>Listening script (the audio is coming soon; until then, read it aloud with a volunteer at a normal, friendly speed):</a:t>
-            </a:r>
-          </a:p>
-          <a:p>
-            <a:r>
-              <a:t>Narrator: Lesson five. Patricia is going away for a week. First, she talks to her neighbor, Mr. Wilson.</a:t>
-            </a:r>
-          </a:p>
-          <a:p>
-            <a:r>
-              <a:t>Patricia: Hi, Mr. Wilson. Could I ask you a favor?</a:t>
-            </a:r>
-          </a:p>
-          <a:p>
-            <a:r>
-              <a:t>Mr. Wilson: Of course, Patricia. What is it?</a:t>
-            </a:r>
-          </a:p>
-          <a:p>
-            <a:r>
-              <a:t>Patricia: I'm going to be away next week. I'm visiting my sister. Would you mind getting my mail?</a:t>
-            </a:r>
-          </a:p>
-          <a:p>
-            <a:r>
-              <a:t>Mr. Wilson: No, not at all. I'm home all week.</a:t>
-            </a:r>
-          </a:p>
-          <a:p>
-            <a:r>
-              <a:t>Patricia: Thank you! And would you mind watering my plants? Just two times, on Tuesday and Friday.</a:t>
-            </a:r>
-          </a:p>
-          <a:p>
-            <a:r>
-              <a:t>Mr. Wilson: That is no problem. Where are you going to leave the key?</a:t>
-            </a:r>
-          </a:p>
-          <a:p>
-            <a:r>
-              <a:t>Patricia: I'm going to give you my spare key tonight. Oh, and would you mind feeding my cat, too?</a:t>
-            </a:r>
-          </a:p>
-          <a:p>
-            <a:r>
-              <a:t>Mr. Wilson: Sure, I'll do it. I love cats. Do you mind if I put your packages inside, too?</a:t>
-            </a:r>
-          </a:p>
-          <a:p>
-            <a:r>
-              <a:t>Patricia: No, go ahead. That's very kind.</a:t>
-            </a:r>
-          </a:p>
-          <a:p>
-            <a:r>
-              <a:t>Mr. Wilson: Have a good trip. Don't worry about anything.</a:t>
-            </a:r>
-          </a:p>
-          <a:p>
-            <a:r>
-              <a:t>Narrator: The next day at work, Patricia talks with Omar.</a:t>
-            </a:r>
-          </a:p>
-          <a:p>
-            <a:r>
-              <a:t>Omar: Hey, Patricia. Would you mind covering my Saturday shift? My son has a soccer game.</a:t>
-            </a:r>
-          </a:p>
-          <a:p>
-            <a:r>
-              <a:t>Patricia: Oh, I'm sorry, I can't. I'll be away on Saturday. I want to help, but I can't.</a:t>
-            </a:r>
-          </a:p>
-          <a:p>
-            <a:r>
-              <a:t>Omar: Oh, right. You told me.</a:t>
-            </a:r>
-          </a:p>
-          <a:p>
-            <a:r>
-              <a:t>Patricia: Why don't you ask Lena? She wants more hours this month.</a:t>
-            </a:r>
-          </a:p>
-          <a:p>
-            <a:r>
-              <a:t>Omar: Good idea. Do you mind if I tell her you suggested it?</a:t>
-            </a:r>
-          </a:p>
-          <a:p>
-            <a:r>
-              <a:t>Patricia: No, not at all. But ask the supervisor first, OK?</a:t>
-            </a:r>
-          </a:p>
-          <a:p>
-            <a:r>
-              <a:t>Omar: Sure. Thanks, Patricia. I owe you one.</a:t>
-            </a:r>
-          </a:p>
-          <a:p>
-            <a:r>
-              <a:t>Patricia: You're welcome. Good luck with the game!</a:t>
-            </a:r>
-          </a:p>
-          <a:p>
-            <a:r>
-              <a:t>Narrator: That's the end of the listening.</a:t>
             </a:r>
           </a:p>
         </p:txBody>
@@ -2831,7 +2721,7 @@
           </a:p>
           <a:p>
             <a:r>
-              <a:t>Audio: the listening audio for this lesson (about 1:47) is coming soon. It will use computer-generated voices (Chatterbox TTS cloned from synthetic Kokoro-82M reference clips); no recordings of real people. Until it is ready, read the listening script (in the notes of the Before You Listen slide) with a volunteer. The names and the story are invented.</a:t>
+              <a:t>Audio: synthetic voices, computer-generated (Chatterbox TTS cloned from Kokoro-82M reference clips). No recordings of real people. The names and the story are invented.</a:t>
             </a:r>
           </a:p>
           <a:p>
@@ -12074,7 +11964,7 @@
                 <a:ea typeface="Lexend Deca" pitchFamily="34" charset="-122"/>
                 <a:cs typeface="Lexend Deca" pitchFamily="34" charset="-120"/>
               </a:rPr>
-              <a:t>Audio (about 1:47): coming soon.</a:t>
+              <a:t>Audio: about 1:54. It plays once.</a:t>
             </a:r>
             <a:endParaRPr lang="en-US" sz="2200" dirty="0"/>
           </a:p>
@@ -30771,7 +30661,7 @@
                 <a:ea typeface="Lexend Deca" pitchFamily="34" charset="-122"/>
                 <a:cs typeface="Lexend Deca" pitchFamily="34" charset="-120"/>
               </a:rPr>
-              <a:t>Audio (coming soon): synthetic voices made with Chatterbox TTS (MIT License), cloned from short synthetic reference clips made with Kokoro-82M (Apache License 2.0). No recordings of real people. Each file will carry an inaudible Perth watermark marking it as AI-generated. Font: Lexend Deca (OFL 1.1).</a:t>
+              <a:t>Audio: synthetic voices made with Chatterbox TTS (MIT License), cloned from short synthetic reference clips made with Kokoro-82M (Apache License 2.0). No recordings of real people were used. Each file carries an inaudible Perth watermark marking it as AI-generated. Font: Lexend Deca (OFL 1.1).</a:t>
             </a:r>
             <a:endParaRPr lang="en-US" sz="1350" dirty="0" b="0"/>
           </a:p>

--- a/level4/slides/Level4_Lesson5_Slides.pptx
+++ b/level4/slides/Level4_Lesson5_Slides.pptx
@@ -1536,7 +1536,7 @@
           </a:p>
           <a:p>
             <a:r>
-              <a:t>Reductions: the listening says going to and want to. People often say gonna and wanna. Learners only need to recognize the short forms.</a:t>
+              <a:t>Everyday English: people often say gonna (going to) and wanna (want to). Learners will hear them often. They are fine in casual talk; in writing, at a job interview, or in a formal email, use going to and want to. The listening uses the full forms.</a:t>
             </a:r>
           </a:p>
           <a:p>
@@ -16375,7 +16375,7 @@
                 <a:ea typeface="Lexend Deca" pitchFamily="34" charset="-122"/>
                 <a:cs typeface="Lexend Deca" pitchFamily="34" charset="-120"/>
               </a:rPr>
-              <a:t> and </a:t>
+              <a:t> = going to, </a:t>
             </a:r>
             <a:r>
               <a:rPr lang="en-US" sz="2000" dirty="0" b="1">
@@ -16397,7 +16397,7 @@
                 <a:ea typeface="Lexend Deca" pitchFamily="34" charset="-122"/>
                 <a:cs typeface="Lexend Deca" pitchFamily="34" charset="-120"/>
               </a:rPr>
-              <a:t> are short forms. This listening uses the full forms.</a:t>
+              <a:t> = want to: fine in everyday talk.</a:t>
             </a:r>
             <a:endParaRPr lang="en-US" sz="2000" dirty="0"/>
           </a:p>
